--- a/docs/pptx/entire/ritu-entire-ratio-by-age75.pptx
+++ b/docs/pptx/entire/ritu-entire-ratio-by-age75.pptx
@@ -2357,7 +2357,7 @@
           </p:nvSpPr>
           <p:spPr>
             <a:xfrm>
-              <a:off x="1087269" y="3755851"/>
+              <a:off x="1087269" y="3755852"/>
               <a:ext cx="7523614" cy="0"/>
             </a:xfrm>
             <a:custGeom>
@@ -2930,7 +2930,7 @@
                     <a:pt x="13384" y="2725785"/>
                   </a:lnTo>
                   <a:lnTo>
-                    <a:pt x="26769" y="2725606"/>
+                    <a:pt x="26769" y="2725605"/>
                   </a:lnTo>
                   <a:lnTo>
                     <a:pt x="40154" y="2725402"/>
@@ -2948,16 +2948,16 @@
                     <a:pt x="93693" y="2724378"/>
                   </a:lnTo>
                   <a:lnTo>
-                    <a:pt x="107078" y="2724060"/>
+                    <a:pt x="107078" y="2724059"/>
                   </a:lnTo>
                   <a:lnTo>
                     <a:pt x="120463" y="2723717"/>
                   </a:lnTo>
                   <a:lnTo>
-                    <a:pt x="133848" y="2723335"/>
-                  </a:lnTo>
-                  <a:lnTo>
-                    <a:pt x="147233" y="2722920"/>
+                    <a:pt x="133848" y="2723334"/>
+                  </a:lnTo>
+                  <a:lnTo>
+                    <a:pt x="147233" y="2722919"/>
                   </a:lnTo>
                   <a:lnTo>
                     <a:pt x="160617" y="2722475"/>
@@ -3005,7 +3005,7 @@
                     <a:pt x="348005" y="2711095"/>
                   </a:lnTo>
                   <a:lnTo>
-                    <a:pt x="361390" y="2709824"/>
+                    <a:pt x="361390" y="2709823"/>
                   </a:lnTo>
                   <a:lnTo>
                     <a:pt x="374775" y="2708452"/>
@@ -3017,7 +3017,7 @@
                     <a:pt x="401544" y="2705509"/>
                   </a:lnTo>
                   <a:lnTo>
-                    <a:pt x="414929" y="2703904"/>
+                    <a:pt x="414929" y="2703903"/>
                   </a:lnTo>
                   <a:lnTo>
                     <a:pt x="428314" y="2702210"/>
@@ -3041,16 +3041,16 @@
                     <a:pt x="508623" y="2690234"/>
                   </a:lnTo>
                   <a:lnTo>
-                    <a:pt x="522008" y="2687904"/>
+                    <a:pt x="522008" y="2687903"/>
                   </a:lnTo>
                   <a:lnTo>
                     <a:pt x="535393" y="2685493"/>
                   </a:lnTo>
                   <a:lnTo>
-                    <a:pt x="548778" y="2682998"/>
-                  </a:lnTo>
-                  <a:lnTo>
-                    <a:pt x="562162" y="2680375"/>
+                    <a:pt x="548778" y="2682997"/>
+                  </a:lnTo>
+                  <a:lnTo>
+                    <a:pt x="562162" y="2680374"/>
                   </a:lnTo>
                   <a:lnTo>
                     <a:pt x="575547" y="2677672"/>
@@ -3110,13 +3110,13 @@
                     <a:pt x="816474" y="2613713"/>
                   </a:lnTo>
                   <a:lnTo>
-                    <a:pt x="829859" y="2609378"/>
-                  </a:lnTo>
-                  <a:lnTo>
-                    <a:pt x="843244" y="2604925"/>
-                  </a:lnTo>
-                  <a:lnTo>
-                    <a:pt x="856629" y="2600399"/>
+                    <a:pt x="829859" y="2609377"/>
+                  </a:lnTo>
+                  <a:lnTo>
+                    <a:pt x="843244" y="2604924"/>
+                  </a:lnTo>
+                  <a:lnTo>
+                    <a:pt x="856629" y="2600398"/>
                   </a:lnTo>
                   <a:lnTo>
                     <a:pt x="870014" y="2595798"/>
@@ -3125,16 +3125,16 @@
                     <a:pt x="883398" y="2591098"/>
                   </a:lnTo>
                   <a:lnTo>
-                    <a:pt x="896783" y="2586290"/>
-                  </a:lnTo>
-                  <a:lnTo>
-                    <a:pt x="910168" y="2581397"/>
+                    <a:pt x="896783" y="2586289"/>
+                  </a:lnTo>
+                  <a:lnTo>
+                    <a:pt x="910168" y="2581396"/>
                   </a:lnTo>
                   <a:lnTo>
                     <a:pt x="923553" y="2576417"/>
                   </a:lnTo>
                   <a:lnTo>
-                    <a:pt x="936938" y="2571287"/>
+                    <a:pt x="936938" y="2571286"/>
                   </a:lnTo>
                   <a:lnTo>
                     <a:pt x="950323" y="2566052"/>
@@ -3149,10 +3149,10 @@
                     <a:pt x="990477" y="2549586"/>
                   </a:lnTo>
                   <a:lnTo>
-                    <a:pt x="1003862" y="2543810"/>
-                  </a:lnTo>
-                  <a:lnTo>
-                    <a:pt x="1017247" y="2537900"/>
+                    <a:pt x="1003862" y="2543809"/>
+                  </a:lnTo>
+                  <a:lnTo>
+                    <a:pt x="1017247" y="2537899"/>
                   </a:lnTo>
                   <a:lnTo>
                     <a:pt x="1030632" y="2531754"/>
@@ -3167,7 +3167,7 @@
                     <a:pt x="1070786" y="2512253"/>
                   </a:lnTo>
                   <a:lnTo>
-                    <a:pt x="1084171" y="2505279"/>
+                    <a:pt x="1084171" y="2505278"/>
                   </a:lnTo>
                   <a:lnTo>
                     <a:pt x="1097556" y="2498098"/>
@@ -3176,10 +3176,10 @@
                     <a:pt x="1110941" y="2490706"/>
                   </a:lnTo>
                   <a:lnTo>
-                    <a:pt x="1124325" y="2482952"/>
-                  </a:lnTo>
-                  <a:lnTo>
-                    <a:pt x="1137710" y="2474932"/>
+                    <a:pt x="1124325" y="2482951"/>
+                  </a:lnTo>
+                  <a:lnTo>
+                    <a:pt x="1137710" y="2474931"/>
                   </a:lnTo>
                   <a:lnTo>
                     <a:pt x="1151095" y="2466657"/>
@@ -3197,7 +3197,7 @@
                     <a:pt x="1204634" y="2430133"/>
                   </a:lnTo>
                   <a:lnTo>
-                    <a:pt x="1218019" y="2420028"/>
+                    <a:pt x="1218019" y="2420027"/>
                   </a:lnTo>
                   <a:lnTo>
                     <a:pt x="1231404" y="2409554"/>
@@ -3221,13 +3221,13 @@
                     <a:pt x="1311713" y="2337998"/>
                   </a:lnTo>
                   <a:lnTo>
-                    <a:pt x="1325098" y="2324468"/>
+                    <a:pt x="1325098" y="2324467"/>
                   </a:lnTo>
                   <a:lnTo>
                     <a:pt x="1338483" y="2310548"/>
                   </a:lnTo>
                   <a:lnTo>
-                    <a:pt x="1351868" y="2296161"/>
+                    <a:pt x="1351868" y="2296160"/>
                   </a:lnTo>
                   <a:lnTo>
                     <a:pt x="1365252" y="2281201"/>
@@ -3251,7 +3251,7 @@
                     <a:pt x="1445561" y="2182427"/>
                   </a:lnTo>
                   <a:lnTo>
-                    <a:pt x="1458946" y="2164387"/>
+                    <a:pt x="1458946" y="2164386"/>
                   </a:lnTo>
                   <a:lnTo>
                     <a:pt x="1472331" y="2146018"/>
@@ -3278,7 +3278,7 @@
                     <a:pt x="1566025" y="2008030"/>
                   </a:lnTo>
                   <a:lnTo>
-                    <a:pt x="1579410" y="1987276"/>
+                    <a:pt x="1579410" y="1987275"/>
                   </a:lnTo>
                   <a:lnTo>
                     <a:pt x="1592795" y="1966280"/>
@@ -3293,7 +3293,7 @@
                     <a:pt x="1632949" y="1902458"/>
                   </a:lnTo>
                   <a:lnTo>
-                    <a:pt x="1646334" y="1880954"/>
+                    <a:pt x="1646334" y="1880953"/>
                   </a:lnTo>
                   <a:lnTo>
                     <a:pt x="1659719" y="1859401"/>
@@ -3356,7 +3356,7 @@
                     <a:pt x="1914031" y="1459396"/>
                   </a:lnTo>
                   <a:lnTo>
-                    <a:pt x="1927415" y="1439235"/>
+                    <a:pt x="1927415" y="1439234"/>
                   </a:lnTo>
                   <a:lnTo>
                     <a:pt x="1940800" y="1419107"/>
@@ -3386,7 +3386,7 @@
                     <a:pt x="2047879" y="1257767"/>
                   </a:lnTo>
                   <a:lnTo>
-                    <a:pt x="2061264" y="1237302"/>
+                    <a:pt x="2061264" y="1237301"/>
                   </a:lnTo>
                   <a:lnTo>
                     <a:pt x="2074649" y="1216701"/>
@@ -3764,7 +3764,7 @@
                     <a:pt x="3734368" y="273358"/>
                   </a:lnTo>
                   <a:lnTo>
-                    <a:pt x="3747753" y="293189"/>
+                    <a:pt x="3747753" y="293188"/>
                   </a:lnTo>
                   <a:lnTo>
                     <a:pt x="3761138" y="313760"/>
@@ -3833,7 +3833,7 @@
                     <a:pt x="4042219" y="813077"/>
                   </a:lnTo>
                   <a:lnTo>
-                    <a:pt x="4055604" y="837264"/>
+                    <a:pt x="4055604" y="837263"/>
                   </a:lnTo>
                   <a:lnTo>
                     <a:pt x="4068989" y="861282"/>
@@ -3875,7 +3875,7 @@
                     <a:pt x="4229607" y="1125467"/>
                   </a:lnTo>
                   <a:lnTo>
-                    <a:pt x="4242992" y="1144884"/>
+                    <a:pt x="4242992" y="1144883"/>
                   </a:lnTo>
                   <a:lnTo>
                     <a:pt x="4256376" y="1163912"/>
@@ -3929,7 +3929,7 @@
                     <a:pt x="4470534" y="1401442"/>
                   </a:lnTo>
                   <a:lnTo>
-                    <a:pt x="4483919" y="1412241"/>
+                    <a:pt x="4483919" y="1412240"/>
                   </a:lnTo>
                   <a:lnTo>
                     <a:pt x="4497303" y="1422683"/>
@@ -3986,7 +3986,7 @@
                     <a:pt x="4724846" y="1555222"/>
                   </a:lnTo>
                   <a:lnTo>
-                    <a:pt x="4738230" y="1561834"/>
+                    <a:pt x="4738230" y="1561833"/>
                   </a:lnTo>
                   <a:lnTo>
                     <a:pt x="4751615" y="1568494"/>
@@ -4004,7 +4004,7 @@
                     <a:pt x="4805155" y="1595960"/>
                   </a:lnTo>
                   <a:lnTo>
-                    <a:pt x="4818539" y="1603146"/>
+                    <a:pt x="4818539" y="1603145"/>
                   </a:lnTo>
                   <a:lnTo>
                     <a:pt x="4831924" y="1610469"/>
@@ -4022,7 +4022,7 @@
                     <a:pt x="4885464" y="1641988"/>
                   </a:lnTo>
                   <a:lnTo>
-                    <a:pt x="4898848" y="1650490"/>
+                    <a:pt x="4898848" y="1650489"/>
                   </a:lnTo>
                   <a:lnTo>
                     <a:pt x="4912233" y="1659212"/>
@@ -4037,7 +4037,7 @@
                     <a:pt x="4952388" y="1687064"/>
                   </a:lnTo>
                   <a:lnTo>
-                    <a:pt x="4965773" y="1696886"/>
+                    <a:pt x="4965773" y="1696885"/>
                   </a:lnTo>
                   <a:lnTo>
                     <a:pt x="4979157" y="1707018"/>
@@ -4106,7 +4106,7 @@
                     <a:pt x="5260239" y="1976789"/>
                   </a:lnTo>
                   <a:lnTo>
-                    <a:pt x="5273624" y="1991271"/>
+                    <a:pt x="5273624" y="1991270"/>
                   </a:lnTo>
                   <a:lnTo>
                     <a:pt x="5287009" y="2005764"/>
@@ -4148,7 +4148,7 @@
                     <a:pt x="5447627" y="2174671"/>
                   </a:lnTo>
                   <a:lnTo>
-                    <a:pt x="5461011" y="2187793"/>
+                    <a:pt x="5461011" y="2187792"/>
                   </a:lnTo>
                   <a:lnTo>
                     <a:pt x="5474396" y="2200736"/>
@@ -4196,7 +4196,7 @@
                     <a:pt x="5661784" y="2355055"/>
                   </a:lnTo>
                   <a:lnTo>
-                    <a:pt x="5675169" y="2363984"/>
+                    <a:pt x="5675169" y="2363983"/>
                   </a:lnTo>
                   <a:lnTo>
                     <a:pt x="5688554" y="2372562"/>
@@ -4211,7 +4211,7 @@
                     <a:pt x="5728708" y="2396640"/>
                   </a:lnTo>
                   <a:lnTo>
-                    <a:pt x="5742093" y="2404040"/>
+                    <a:pt x="5742093" y="2404039"/>
                   </a:lnTo>
                   <a:lnTo>
                     <a:pt x="5755478" y="2411209"/>
@@ -4262,19 +4262,19 @@
                     <a:pt x="5956250" y="2491211"/>
                   </a:lnTo>
                   <a:lnTo>
-                    <a:pt x="5969635" y="2495136"/>
-                  </a:lnTo>
-                  <a:lnTo>
-                    <a:pt x="5983020" y="2498935"/>
-                  </a:lnTo>
-                  <a:lnTo>
-                    <a:pt x="5996405" y="2502646"/>
+                    <a:pt x="5969635" y="2495135"/>
+                  </a:lnTo>
+                  <a:lnTo>
+                    <a:pt x="5983020" y="2498934"/>
+                  </a:lnTo>
+                  <a:lnTo>
+                    <a:pt x="5996405" y="2502645"/>
                   </a:lnTo>
                   <a:lnTo>
                     <a:pt x="6009790" y="2506272"/>
                   </a:lnTo>
                   <a:lnTo>
-                    <a:pt x="6023174" y="2509780"/>
+                    <a:pt x="6023174" y="2509779"/>
                   </a:lnTo>
                   <a:lnTo>
                     <a:pt x="6036559" y="2513225"/>
@@ -4283,7 +4283,7 @@
                     <a:pt x="6049944" y="2516613"/>
                   </a:lnTo>
                   <a:lnTo>
-                    <a:pt x="6063329" y="2519933"/>
+                    <a:pt x="6063329" y="2519932"/>
                   </a:lnTo>
                   <a:lnTo>
                     <a:pt x="6076714" y="2523196"/>
@@ -4295,7 +4295,7 @@
                     <a:pt x="6103483" y="2529616"/>
                   </a:lnTo>
                   <a:lnTo>
-                    <a:pt x="6116868" y="2532767"/>
+                    <a:pt x="6116868" y="2532766"/>
                   </a:lnTo>
                   <a:lnTo>
                     <a:pt x="6130253" y="2535896"/>
@@ -4322,7 +4322,7 @@
                     <a:pt x="6223947" y="2557394"/>
                   </a:lnTo>
                   <a:lnTo>
-                    <a:pt x="6237332" y="2560432"/>
+                    <a:pt x="6237332" y="2560431"/>
                   </a:lnTo>
                   <a:lnTo>
                     <a:pt x="6250717" y="2563462"/>
@@ -4331,13 +4331,13 @@
                     <a:pt x="6264101" y="2566483"/>
                   </a:lnTo>
                   <a:lnTo>
-                    <a:pt x="6277486" y="2569497"/>
+                    <a:pt x="6277486" y="2569496"/>
                   </a:lnTo>
                   <a:lnTo>
                     <a:pt x="6290871" y="2572501"/>
                   </a:lnTo>
                   <a:lnTo>
-                    <a:pt x="6304256" y="2575488"/>
+                    <a:pt x="6304256" y="2575487"/>
                   </a:lnTo>
                   <a:lnTo>
                     <a:pt x="6317641" y="2578459"/>
@@ -4376,7 +4376,7 @@
                     <a:pt x="6464874" y="2609181"/>
                   </a:lnTo>
                   <a:lnTo>
-                    <a:pt x="6478259" y="2611719"/>
+                    <a:pt x="6478259" y="2611718"/>
                   </a:lnTo>
                   <a:lnTo>
                     <a:pt x="6491644" y="2614183"/>
@@ -4394,7 +4394,7 @@
                     <a:pt x="6545183" y="2623473"/>
                   </a:lnTo>
                   <a:lnTo>
-                    <a:pt x="6558568" y="2625644"/>
+                    <a:pt x="6558568" y="2625643"/>
                   </a:lnTo>
                   <a:lnTo>
                     <a:pt x="6571953" y="2627762"/>
@@ -4415,19 +4415,19 @@
                     <a:pt x="6638877" y="2637400"/>
                   </a:lnTo>
                   <a:lnTo>
-                    <a:pt x="6652262" y="2639163"/>
+                    <a:pt x="6652262" y="2639162"/>
                   </a:lnTo>
                   <a:lnTo>
                     <a:pt x="6665646" y="2640882"/>
                   </a:lnTo>
                   <a:lnTo>
-                    <a:pt x="6679031" y="2642541"/>
-                  </a:lnTo>
-                  <a:lnTo>
-                    <a:pt x="6692416" y="2644157"/>
-                  </a:lnTo>
-                  <a:lnTo>
-                    <a:pt x="6705801" y="2645738"/>
+                    <a:pt x="6679031" y="2642540"/>
+                  </a:lnTo>
+                  <a:lnTo>
+                    <a:pt x="6692416" y="2644156"/>
+                  </a:lnTo>
+                  <a:lnTo>
+                    <a:pt x="6705801" y="2645737"/>
                   </a:lnTo>
                   <a:lnTo>
                     <a:pt x="6719186" y="2647281"/>
@@ -4436,13 +4436,13 @@
                     <a:pt x="6732571" y="2648781"/>
                   </a:lnTo>
                   <a:lnTo>
-                    <a:pt x="6745955" y="2650256"/>
-                  </a:lnTo>
-                  <a:lnTo>
-                    <a:pt x="6759340" y="2651707"/>
-                  </a:lnTo>
-                  <a:lnTo>
-                    <a:pt x="6772725" y="2653128"/>
+                    <a:pt x="6745955" y="2650255"/>
+                  </a:lnTo>
+                  <a:lnTo>
+                    <a:pt x="6759340" y="2651706"/>
+                  </a:lnTo>
+                  <a:lnTo>
+                    <a:pt x="6772725" y="2653127"/>
                   </a:lnTo>
                   <a:lnTo>
                     <a:pt x="6786110" y="2654529"/>
@@ -6033,7 +6033,7 @@
                     <a:pt x="13384" y="2725785"/>
                   </a:lnTo>
                   <a:lnTo>
-                    <a:pt x="26769" y="2725606"/>
+                    <a:pt x="26769" y="2725605"/>
                   </a:lnTo>
                   <a:lnTo>
                     <a:pt x="40154" y="2725402"/>
@@ -6051,16 +6051,16 @@
                     <a:pt x="93693" y="2724378"/>
                   </a:lnTo>
                   <a:lnTo>
-                    <a:pt x="107078" y="2724060"/>
+                    <a:pt x="107078" y="2724059"/>
                   </a:lnTo>
                   <a:lnTo>
                     <a:pt x="120463" y="2723717"/>
                   </a:lnTo>
                   <a:lnTo>
-                    <a:pt x="133848" y="2723335"/>
-                  </a:lnTo>
-                  <a:lnTo>
-                    <a:pt x="147233" y="2722920"/>
+                    <a:pt x="133848" y="2723334"/>
+                  </a:lnTo>
+                  <a:lnTo>
+                    <a:pt x="147233" y="2722919"/>
                   </a:lnTo>
                   <a:lnTo>
                     <a:pt x="160617" y="2722475"/>
@@ -6108,7 +6108,7 @@
                     <a:pt x="348005" y="2711095"/>
                   </a:lnTo>
                   <a:lnTo>
-                    <a:pt x="361390" y="2709824"/>
+                    <a:pt x="361390" y="2709823"/>
                   </a:lnTo>
                   <a:lnTo>
                     <a:pt x="374775" y="2708452"/>
@@ -6120,7 +6120,7 @@
                     <a:pt x="401544" y="2705509"/>
                   </a:lnTo>
                   <a:lnTo>
-                    <a:pt x="414929" y="2703904"/>
+                    <a:pt x="414929" y="2703903"/>
                   </a:lnTo>
                   <a:lnTo>
                     <a:pt x="428314" y="2702210"/>
@@ -6144,16 +6144,16 @@
                     <a:pt x="508623" y="2690234"/>
                   </a:lnTo>
                   <a:lnTo>
-                    <a:pt x="522008" y="2687904"/>
+                    <a:pt x="522008" y="2687903"/>
                   </a:lnTo>
                   <a:lnTo>
                     <a:pt x="535393" y="2685493"/>
                   </a:lnTo>
                   <a:lnTo>
-                    <a:pt x="548778" y="2682998"/>
-                  </a:lnTo>
-                  <a:lnTo>
-                    <a:pt x="562162" y="2680375"/>
+                    <a:pt x="548778" y="2682997"/>
+                  </a:lnTo>
+                  <a:lnTo>
+                    <a:pt x="562162" y="2680374"/>
                   </a:lnTo>
                   <a:lnTo>
                     <a:pt x="575547" y="2677672"/>
@@ -6213,13 +6213,13 @@
                     <a:pt x="816474" y="2613713"/>
                   </a:lnTo>
                   <a:lnTo>
-                    <a:pt x="829859" y="2609378"/>
-                  </a:lnTo>
-                  <a:lnTo>
-                    <a:pt x="843244" y="2604925"/>
-                  </a:lnTo>
-                  <a:lnTo>
-                    <a:pt x="856629" y="2600399"/>
+                    <a:pt x="829859" y="2609377"/>
+                  </a:lnTo>
+                  <a:lnTo>
+                    <a:pt x="843244" y="2604924"/>
+                  </a:lnTo>
+                  <a:lnTo>
+                    <a:pt x="856629" y="2600398"/>
                   </a:lnTo>
                   <a:lnTo>
                     <a:pt x="870014" y="2595798"/>
@@ -6228,16 +6228,16 @@
                     <a:pt x="883398" y="2591098"/>
                   </a:lnTo>
                   <a:lnTo>
-                    <a:pt x="896783" y="2586290"/>
-                  </a:lnTo>
-                  <a:lnTo>
-                    <a:pt x="910168" y="2581397"/>
+                    <a:pt x="896783" y="2586289"/>
+                  </a:lnTo>
+                  <a:lnTo>
+                    <a:pt x="910168" y="2581396"/>
                   </a:lnTo>
                   <a:lnTo>
                     <a:pt x="923553" y="2576417"/>
                   </a:lnTo>
                   <a:lnTo>
-                    <a:pt x="936938" y="2571287"/>
+                    <a:pt x="936938" y="2571286"/>
                   </a:lnTo>
                   <a:lnTo>
                     <a:pt x="950323" y="2566052"/>
@@ -6252,10 +6252,10 @@
                     <a:pt x="990477" y="2549586"/>
                   </a:lnTo>
                   <a:lnTo>
-                    <a:pt x="1003862" y="2543810"/>
-                  </a:lnTo>
-                  <a:lnTo>
-                    <a:pt x="1017247" y="2537900"/>
+                    <a:pt x="1003862" y="2543809"/>
+                  </a:lnTo>
+                  <a:lnTo>
+                    <a:pt x="1017247" y="2537899"/>
                   </a:lnTo>
                   <a:lnTo>
                     <a:pt x="1030632" y="2531754"/>
@@ -6270,7 +6270,7 @@
                     <a:pt x="1070786" y="2512253"/>
                   </a:lnTo>
                   <a:lnTo>
-                    <a:pt x="1084171" y="2505279"/>
+                    <a:pt x="1084171" y="2505278"/>
                   </a:lnTo>
                   <a:lnTo>
                     <a:pt x="1097556" y="2498098"/>
@@ -6279,10 +6279,10 @@
                     <a:pt x="1110941" y="2490706"/>
                   </a:lnTo>
                   <a:lnTo>
-                    <a:pt x="1124325" y="2482952"/>
-                  </a:lnTo>
-                  <a:lnTo>
-                    <a:pt x="1137710" y="2474932"/>
+                    <a:pt x="1124325" y="2482951"/>
+                  </a:lnTo>
+                  <a:lnTo>
+                    <a:pt x="1137710" y="2474931"/>
                   </a:lnTo>
                   <a:lnTo>
                     <a:pt x="1151095" y="2466657"/>
@@ -6300,7 +6300,7 @@
                     <a:pt x="1204634" y="2430133"/>
                   </a:lnTo>
                   <a:lnTo>
-                    <a:pt x="1218019" y="2420028"/>
+                    <a:pt x="1218019" y="2420027"/>
                   </a:lnTo>
                   <a:lnTo>
                     <a:pt x="1231404" y="2409554"/>
@@ -6324,13 +6324,13 @@
                     <a:pt x="1311713" y="2337998"/>
                   </a:lnTo>
                   <a:lnTo>
-                    <a:pt x="1325098" y="2324468"/>
+                    <a:pt x="1325098" y="2324467"/>
                   </a:lnTo>
                   <a:lnTo>
                     <a:pt x="1338483" y="2310548"/>
                   </a:lnTo>
                   <a:lnTo>
-                    <a:pt x="1351868" y="2296161"/>
+                    <a:pt x="1351868" y="2296160"/>
                   </a:lnTo>
                   <a:lnTo>
                     <a:pt x="1365252" y="2281201"/>
@@ -6354,7 +6354,7 @@
                     <a:pt x="1445561" y="2182427"/>
                   </a:lnTo>
                   <a:lnTo>
-                    <a:pt x="1458946" y="2164387"/>
+                    <a:pt x="1458946" y="2164386"/>
                   </a:lnTo>
                   <a:lnTo>
                     <a:pt x="1472331" y="2146018"/>
@@ -6381,7 +6381,7 @@
                     <a:pt x="1566025" y="2008030"/>
                   </a:lnTo>
                   <a:lnTo>
-                    <a:pt x="1579410" y="1987276"/>
+                    <a:pt x="1579410" y="1987275"/>
                   </a:lnTo>
                   <a:lnTo>
                     <a:pt x="1592795" y="1966280"/>
@@ -6396,7 +6396,7 @@
                     <a:pt x="1632949" y="1902458"/>
                   </a:lnTo>
                   <a:lnTo>
-                    <a:pt x="1646334" y="1880954"/>
+                    <a:pt x="1646334" y="1880953"/>
                   </a:lnTo>
                   <a:lnTo>
                     <a:pt x="1659719" y="1859401"/>
@@ -6459,7 +6459,7 @@
                     <a:pt x="1914031" y="1459396"/>
                   </a:lnTo>
                   <a:lnTo>
-                    <a:pt x="1927415" y="1439235"/>
+                    <a:pt x="1927415" y="1439234"/>
                   </a:lnTo>
                   <a:lnTo>
                     <a:pt x="1940800" y="1419107"/>
@@ -6489,7 +6489,7 @@
                     <a:pt x="2047879" y="1257767"/>
                   </a:lnTo>
                   <a:lnTo>
-                    <a:pt x="2061264" y="1237302"/>
+                    <a:pt x="2061264" y="1237301"/>
                   </a:lnTo>
                   <a:lnTo>
                     <a:pt x="2074649" y="1216701"/>
@@ -6867,7 +6867,7 @@
                     <a:pt x="3734368" y="273358"/>
                   </a:lnTo>
                   <a:lnTo>
-                    <a:pt x="3747753" y="293189"/>
+                    <a:pt x="3747753" y="293188"/>
                   </a:lnTo>
                   <a:lnTo>
                     <a:pt x="3761138" y="313760"/>
@@ -6936,7 +6936,7 @@
                     <a:pt x="4042219" y="813077"/>
                   </a:lnTo>
                   <a:lnTo>
-                    <a:pt x="4055604" y="837264"/>
+                    <a:pt x="4055604" y="837263"/>
                   </a:lnTo>
                   <a:lnTo>
                     <a:pt x="4068989" y="861282"/>
@@ -6978,7 +6978,7 @@
                     <a:pt x="4229607" y="1125467"/>
                   </a:lnTo>
                   <a:lnTo>
-                    <a:pt x="4242992" y="1144884"/>
+                    <a:pt x="4242992" y="1144883"/>
                   </a:lnTo>
                   <a:lnTo>
                     <a:pt x="4256376" y="1163912"/>
@@ -7032,7 +7032,7 @@
                     <a:pt x="4470534" y="1401442"/>
                   </a:lnTo>
                   <a:lnTo>
-                    <a:pt x="4483919" y="1412241"/>
+                    <a:pt x="4483919" y="1412240"/>
                   </a:lnTo>
                   <a:lnTo>
                     <a:pt x="4497303" y="1422683"/>
@@ -7089,7 +7089,7 @@
                     <a:pt x="4724846" y="1555222"/>
                   </a:lnTo>
                   <a:lnTo>
-                    <a:pt x="4738230" y="1561834"/>
+                    <a:pt x="4738230" y="1561833"/>
                   </a:lnTo>
                   <a:lnTo>
                     <a:pt x="4751615" y="1568494"/>
@@ -7107,7 +7107,7 @@
                     <a:pt x="4805155" y="1595960"/>
                   </a:lnTo>
                   <a:lnTo>
-                    <a:pt x="4818539" y="1603146"/>
+                    <a:pt x="4818539" y="1603145"/>
                   </a:lnTo>
                   <a:lnTo>
                     <a:pt x="4831924" y="1610469"/>
@@ -7125,7 +7125,7 @@
                     <a:pt x="4885464" y="1641988"/>
                   </a:lnTo>
                   <a:lnTo>
-                    <a:pt x="4898848" y="1650490"/>
+                    <a:pt x="4898848" y="1650489"/>
                   </a:lnTo>
                   <a:lnTo>
                     <a:pt x="4912233" y="1659212"/>
@@ -7140,7 +7140,7 @@
                     <a:pt x="4952388" y="1687064"/>
                   </a:lnTo>
                   <a:lnTo>
-                    <a:pt x="4965773" y="1696886"/>
+                    <a:pt x="4965773" y="1696885"/>
                   </a:lnTo>
                   <a:lnTo>
                     <a:pt x="4979157" y="1707018"/>
@@ -7209,7 +7209,7 @@
                     <a:pt x="5260239" y="1976789"/>
                   </a:lnTo>
                   <a:lnTo>
-                    <a:pt x="5273624" y="1991271"/>
+                    <a:pt x="5273624" y="1991270"/>
                   </a:lnTo>
                   <a:lnTo>
                     <a:pt x="5287009" y="2005764"/>
@@ -7251,7 +7251,7 @@
                     <a:pt x="5447627" y="2174671"/>
                   </a:lnTo>
                   <a:lnTo>
-                    <a:pt x="5461011" y="2187793"/>
+                    <a:pt x="5461011" y="2187792"/>
                   </a:lnTo>
                   <a:lnTo>
                     <a:pt x="5474396" y="2200736"/>
@@ -7299,7 +7299,7 @@
                     <a:pt x="5661784" y="2355055"/>
                   </a:lnTo>
                   <a:lnTo>
-                    <a:pt x="5675169" y="2363984"/>
+                    <a:pt x="5675169" y="2363983"/>
                   </a:lnTo>
                   <a:lnTo>
                     <a:pt x="5688554" y="2372562"/>
@@ -7314,7 +7314,7 @@
                     <a:pt x="5728708" y="2396640"/>
                   </a:lnTo>
                   <a:lnTo>
-                    <a:pt x="5742093" y="2404040"/>
+                    <a:pt x="5742093" y="2404039"/>
                   </a:lnTo>
                   <a:lnTo>
                     <a:pt x="5755478" y="2411209"/>
@@ -7365,19 +7365,19 @@
                     <a:pt x="5956250" y="2491211"/>
                   </a:lnTo>
                   <a:lnTo>
-                    <a:pt x="5969635" y="2495136"/>
-                  </a:lnTo>
-                  <a:lnTo>
-                    <a:pt x="5983020" y="2498935"/>
-                  </a:lnTo>
-                  <a:lnTo>
-                    <a:pt x="5996405" y="2502646"/>
+                    <a:pt x="5969635" y="2495135"/>
+                  </a:lnTo>
+                  <a:lnTo>
+                    <a:pt x="5983020" y="2498934"/>
+                  </a:lnTo>
+                  <a:lnTo>
+                    <a:pt x="5996405" y="2502645"/>
                   </a:lnTo>
                   <a:lnTo>
                     <a:pt x="6009790" y="2506272"/>
                   </a:lnTo>
                   <a:lnTo>
-                    <a:pt x="6023174" y="2509780"/>
+                    <a:pt x="6023174" y="2509779"/>
                   </a:lnTo>
                   <a:lnTo>
                     <a:pt x="6036559" y="2513225"/>
@@ -7386,7 +7386,7 @@
                     <a:pt x="6049944" y="2516613"/>
                   </a:lnTo>
                   <a:lnTo>
-                    <a:pt x="6063329" y="2519933"/>
+                    <a:pt x="6063329" y="2519932"/>
                   </a:lnTo>
                   <a:lnTo>
                     <a:pt x="6076714" y="2523196"/>
@@ -7398,7 +7398,7 @@
                     <a:pt x="6103483" y="2529616"/>
                   </a:lnTo>
                   <a:lnTo>
-                    <a:pt x="6116868" y="2532767"/>
+                    <a:pt x="6116868" y="2532766"/>
                   </a:lnTo>
                   <a:lnTo>
                     <a:pt x="6130253" y="2535896"/>
@@ -7425,7 +7425,7 @@
                     <a:pt x="6223947" y="2557394"/>
                   </a:lnTo>
                   <a:lnTo>
-                    <a:pt x="6237332" y="2560432"/>
+                    <a:pt x="6237332" y="2560431"/>
                   </a:lnTo>
                   <a:lnTo>
                     <a:pt x="6250717" y="2563462"/>
@@ -7434,13 +7434,13 @@
                     <a:pt x="6264101" y="2566483"/>
                   </a:lnTo>
                   <a:lnTo>
-                    <a:pt x="6277486" y="2569497"/>
+                    <a:pt x="6277486" y="2569496"/>
                   </a:lnTo>
                   <a:lnTo>
                     <a:pt x="6290871" y="2572501"/>
                   </a:lnTo>
                   <a:lnTo>
-                    <a:pt x="6304256" y="2575488"/>
+                    <a:pt x="6304256" y="2575487"/>
                   </a:lnTo>
                   <a:lnTo>
                     <a:pt x="6317641" y="2578459"/>
@@ -7479,7 +7479,7 @@
                     <a:pt x="6464874" y="2609181"/>
                   </a:lnTo>
                   <a:lnTo>
-                    <a:pt x="6478259" y="2611719"/>
+                    <a:pt x="6478259" y="2611718"/>
                   </a:lnTo>
                   <a:lnTo>
                     <a:pt x="6491644" y="2614183"/>
@@ -7497,7 +7497,7 @@
                     <a:pt x="6545183" y="2623473"/>
                   </a:lnTo>
                   <a:lnTo>
-                    <a:pt x="6558568" y="2625644"/>
+                    <a:pt x="6558568" y="2625643"/>
                   </a:lnTo>
                   <a:lnTo>
                     <a:pt x="6571953" y="2627762"/>
@@ -7518,19 +7518,19 @@
                     <a:pt x="6638877" y="2637400"/>
                   </a:lnTo>
                   <a:lnTo>
-                    <a:pt x="6652262" y="2639163"/>
+                    <a:pt x="6652262" y="2639162"/>
                   </a:lnTo>
                   <a:lnTo>
                     <a:pt x="6665646" y="2640882"/>
                   </a:lnTo>
                   <a:lnTo>
-                    <a:pt x="6679031" y="2642541"/>
-                  </a:lnTo>
-                  <a:lnTo>
-                    <a:pt x="6692416" y="2644157"/>
-                  </a:lnTo>
-                  <a:lnTo>
-                    <a:pt x="6705801" y="2645738"/>
+                    <a:pt x="6679031" y="2642540"/>
+                  </a:lnTo>
+                  <a:lnTo>
+                    <a:pt x="6692416" y="2644156"/>
+                  </a:lnTo>
+                  <a:lnTo>
+                    <a:pt x="6705801" y="2645737"/>
                   </a:lnTo>
                   <a:lnTo>
                     <a:pt x="6719186" y="2647281"/>
@@ -7539,13 +7539,13 @@
                     <a:pt x="6732571" y="2648781"/>
                   </a:lnTo>
                   <a:lnTo>
-                    <a:pt x="6745955" y="2650256"/>
-                  </a:lnTo>
-                  <a:lnTo>
-                    <a:pt x="6759340" y="2651707"/>
-                  </a:lnTo>
-                  <a:lnTo>
-                    <a:pt x="6772725" y="2653128"/>
+                    <a:pt x="6745955" y="2650255"/>
+                  </a:lnTo>
+                  <a:lnTo>
+                    <a:pt x="6759340" y="2651706"/>
+                  </a:lnTo>
+                  <a:lnTo>
+                    <a:pt x="6772725" y="2653127"/>
                   </a:lnTo>
                   <a:lnTo>
                     <a:pt x="6786110" y="2654529"/>
@@ -7744,7 +7744,7 @@
                     <a:pt x="642471" y="2357528"/>
                   </a:lnTo>
                   <a:lnTo>
-                    <a:pt x="655856" y="2352832"/>
+                    <a:pt x="655856" y="2352833"/>
                   </a:lnTo>
                   <a:lnTo>
                     <a:pt x="669241" y="2348012"/>
@@ -7756,7 +7756,7 @@
                     <a:pt x="696011" y="2337886"/>
                   </a:lnTo>
                   <a:lnTo>
-                    <a:pt x="709396" y="2332414"/>
+                    <a:pt x="709396" y="2332415"/>
                   </a:lnTo>
                   <a:lnTo>
                     <a:pt x="722780" y="2326671"/>
@@ -7786,7 +7786,7 @@
                     <a:pt x="829859" y="2266437"/>
                   </a:lnTo>
                   <a:lnTo>
-                    <a:pt x="843244" y="2256646"/>
+                    <a:pt x="843244" y="2256647"/>
                   </a:lnTo>
                   <a:lnTo>
                     <a:pt x="856629" y="2246340"/>
@@ -7864,7 +7864,7 @@
                     <a:pt x="1177865" y="1845250"/>
                   </a:lnTo>
                   <a:lnTo>
-                    <a:pt x="1191250" y="1824294"/>
+                    <a:pt x="1191250" y="1824295"/>
                   </a:lnTo>
                   <a:lnTo>
                     <a:pt x="1204634" y="1803205"/>
@@ -7876,7 +7876,7 @@
                     <a:pt x="1231404" y="1760649"/>
                   </a:lnTo>
                   <a:lnTo>
-                    <a:pt x="1244789" y="1739158"/>
+                    <a:pt x="1244789" y="1739159"/>
                   </a:lnTo>
                   <a:lnTo>
                     <a:pt x="1258174" y="1717557"/>
@@ -7885,16 +7885,16 @@
                     <a:pt x="1271559" y="1695843"/>
                   </a:lnTo>
                   <a:lnTo>
-                    <a:pt x="1284943" y="1674013"/>
+                    <a:pt x="1284943" y="1674014"/>
                   </a:lnTo>
                   <a:lnTo>
                     <a:pt x="1298328" y="1652019"/>
                   </a:lnTo>
                   <a:lnTo>
-                    <a:pt x="1311713" y="1629873"/>
-                  </a:lnTo>
-                  <a:lnTo>
-                    <a:pt x="1325098" y="1607576"/>
+                    <a:pt x="1311713" y="1629874"/>
+                  </a:lnTo>
+                  <a:lnTo>
+                    <a:pt x="1325098" y="1607577"/>
                   </a:lnTo>
                   <a:lnTo>
                     <a:pt x="1338483" y="1585116"/>
@@ -7909,10 +7909,10 @@
                     <a:pt x="1378637" y="1516360"/>
                   </a:lnTo>
                   <a:lnTo>
-                    <a:pt x="1392022" y="1492951"/>
-                  </a:lnTo>
-                  <a:lnTo>
-                    <a:pt x="1405407" y="1469277"/>
+                    <a:pt x="1392022" y="1492952"/>
+                  </a:lnTo>
+                  <a:lnTo>
+                    <a:pt x="1405407" y="1469278"/>
                   </a:lnTo>
                   <a:lnTo>
                     <a:pt x="1418792" y="1445194"/>
@@ -7930,7 +7930,7 @@
                     <a:pt x="1472331" y="1345311"/>
                   </a:lnTo>
                   <a:lnTo>
-                    <a:pt x="1485716" y="1319248"/>
+                    <a:pt x="1485716" y="1319249"/>
                   </a:lnTo>
                   <a:lnTo>
                     <a:pt x="1499101" y="1292772"/>
@@ -7942,7 +7942,7 @@
                     <a:pt x="1525870" y="1238538"/>
                   </a:lnTo>
                   <a:lnTo>
-                    <a:pt x="1539255" y="1210609"/>
+                    <a:pt x="1539255" y="1210610"/>
                   </a:lnTo>
                   <a:lnTo>
                     <a:pt x="1552640" y="1182258"/>
@@ -7981,7 +7981,7 @@
                     <a:pt x="1699873" y="847339"/>
                   </a:lnTo>
                   <a:lnTo>
-                    <a:pt x="1713258" y="815995"/>
+                    <a:pt x="1713258" y="815996"/>
                   </a:lnTo>
                   <a:lnTo>
                     <a:pt x="1726643" y="784809"/>
@@ -8086,7 +8086,7 @@
                     <a:pt x="2168342" y="230953"/>
                   </a:lnTo>
                   <a:lnTo>
-                    <a:pt x="2181727" y="229804"/>
+                    <a:pt x="2181727" y="229805"/>
                   </a:lnTo>
                   <a:lnTo>
                     <a:pt x="2195112" y="228968"/>
@@ -8137,7 +8137,7 @@
                     <a:pt x="2395885" y="199190"/>
                   </a:lnTo>
                   <a:lnTo>
-                    <a:pt x="2409269" y="193815"/>
+                    <a:pt x="2409269" y="193816"/>
                   </a:lnTo>
                   <a:lnTo>
                     <a:pt x="2422654" y="187784"/>
@@ -8155,7 +8155,7 @@
                     <a:pt x="2476194" y="158646"/>
                   </a:lnTo>
                   <a:lnTo>
-                    <a:pt x="2489578" y="150166"/>
+                    <a:pt x="2489578" y="150167"/>
                   </a:lnTo>
                   <a:lnTo>
                     <a:pt x="2502963" y="141359"/>
@@ -8224,7 +8224,7 @@
                     <a:pt x="2784045" y="953"/>
                   </a:lnTo>
                   <a:lnTo>
-                    <a:pt x="2797430" y="3038"/>
+                    <a:pt x="2797430" y="3039"/>
                   </a:lnTo>
                   <a:lnTo>
                     <a:pt x="2810814" y="6277"/>
@@ -8260,7 +8260,7 @@
                     <a:pt x="2944663" y="108896"/>
                   </a:lnTo>
                   <a:lnTo>
-                    <a:pt x="2958048" y="125702"/>
+                    <a:pt x="2958048" y="125703"/>
                   </a:lnTo>
                   <a:lnTo>
                     <a:pt x="2971432" y="143396"/>
@@ -8284,22 +8284,22 @@
                     <a:pt x="3051741" y="264409"/>
                   </a:lnTo>
                   <a:lnTo>
-                    <a:pt x="3065126" y="286247"/>
-                  </a:lnTo>
-                  <a:lnTo>
-                    <a:pt x="3078511" y="308367"/>
+                    <a:pt x="3065126" y="286248"/>
+                  </a:lnTo>
+                  <a:lnTo>
+                    <a:pt x="3078511" y="308368"/>
                   </a:lnTo>
                   <a:lnTo>
                     <a:pt x="3091896" y="330576"/>
                   </a:lnTo>
                   <a:lnTo>
-                    <a:pt x="3105281" y="352805"/>
+                    <a:pt x="3105281" y="352806"/>
                   </a:lnTo>
                   <a:lnTo>
                     <a:pt x="3118666" y="374990"/>
                   </a:lnTo>
                   <a:lnTo>
-                    <a:pt x="3132050" y="397001"/>
+                    <a:pt x="3132050" y="397002"/>
                   </a:lnTo>
                   <a:lnTo>
                     <a:pt x="3145435" y="418732"/>
@@ -8308,7 +8308,7 @@
                     <a:pt x="3158820" y="440147"/>
                   </a:lnTo>
                   <a:lnTo>
-                    <a:pt x="3172205" y="461192"/>
+                    <a:pt x="3172205" y="461193"/>
                   </a:lnTo>
                   <a:lnTo>
                     <a:pt x="3185590" y="481772"/>
@@ -8320,13 +8320,13 @@
                     <a:pt x="3212359" y="521000"/>
                   </a:lnTo>
                   <a:lnTo>
-                    <a:pt x="3225744" y="539717"/>
+                    <a:pt x="3225744" y="539718"/>
                   </a:lnTo>
                   <a:lnTo>
                     <a:pt x="3239129" y="557793"/>
                   </a:lnTo>
                   <a:lnTo>
-                    <a:pt x="3252514" y="574967"/>
+                    <a:pt x="3252514" y="574968"/>
                   </a:lnTo>
                   <a:lnTo>
                     <a:pt x="3265899" y="591359"/>
@@ -8335,13 +8335,13 @@
                     <a:pt x="3279284" y="607021"/>
                   </a:lnTo>
                   <a:lnTo>
-                    <a:pt x="3292668" y="621945"/>
+                    <a:pt x="3292668" y="621946"/>
                   </a:lnTo>
                   <a:lnTo>
                     <a:pt x="3306053" y="636022"/>
                   </a:lnTo>
                   <a:lnTo>
-                    <a:pt x="3319438" y="649167"/>
+                    <a:pt x="3319438" y="649168"/>
                   </a:lnTo>
                   <a:lnTo>
                     <a:pt x="3332823" y="661597"/>
@@ -8350,19 +8350,19 @@
                     <a:pt x="3346208" y="673328"/>
                   </a:lnTo>
                   <a:lnTo>
-                    <a:pt x="3359593" y="684381"/>
-                  </a:lnTo>
-                  <a:lnTo>
-                    <a:pt x="3372977" y="694559"/>
-                  </a:lnTo>
-                  <a:lnTo>
-                    <a:pt x="3386362" y="704143"/>
+                    <a:pt x="3359593" y="684382"/>
+                  </a:lnTo>
+                  <a:lnTo>
+                    <a:pt x="3372977" y="694560"/>
+                  </a:lnTo>
+                  <a:lnTo>
+                    <a:pt x="3386362" y="704144"/>
                   </a:lnTo>
                   <a:lnTo>
                     <a:pt x="3399747" y="713193"/>
                   </a:lnTo>
                   <a:lnTo>
-                    <a:pt x="3413132" y="721749"/>
+                    <a:pt x="3413132" y="721750"/>
                   </a:lnTo>
                   <a:lnTo>
                     <a:pt x="3426517" y="729784"/>
@@ -8392,13 +8392,13 @@
                     <a:pt x="3533595" y="786614"/>
                   </a:lnTo>
                   <a:lnTo>
-                    <a:pt x="3546980" y="794003"/>
+                    <a:pt x="3546980" y="794004"/>
                   </a:lnTo>
                   <a:lnTo>
                     <a:pt x="3560365" y="801748"/>
                   </a:lnTo>
                   <a:lnTo>
-                    <a:pt x="3573750" y="809864"/>
+                    <a:pt x="3573750" y="809865"/>
                   </a:lnTo>
                   <a:lnTo>
                     <a:pt x="3587135" y="818398"/>
@@ -8422,7 +8422,7 @@
                     <a:pt x="3667444" y="882557"/>
                   </a:lnTo>
                   <a:lnTo>
-                    <a:pt x="3680829" y="895787"/>
+                    <a:pt x="3680829" y="895788"/>
                   </a:lnTo>
                   <a:lnTo>
                     <a:pt x="3694213" y="909716"/>
@@ -8452,10 +8452,10 @@
                     <a:pt x="3801292" y="1047593"/>
                   </a:lnTo>
                   <a:lnTo>
-                    <a:pt x="3814677" y="1067709"/>
-                  </a:lnTo>
-                  <a:lnTo>
-                    <a:pt x="3828062" y="1088296"/>
+                    <a:pt x="3814677" y="1067710"/>
+                  </a:lnTo>
+                  <a:lnTo>
+                    <a:pt x="3828062" y="1088297"/>
                   </a:lnTo>
                   <a:lnTo>
                     <a:pt x="3841447" y="1109398"/>
@@ -8527,7 +8527,7 @@
                     <a:pt x="4135913" y="1591238"/>
                   </a:lnTo>
                   <a:lnTo>
-                    <a:pt x="4149298" y="1611059"/>
+                    <a:pt x="4149298" y="1611060"/>
                   </a:lnTo>
                   <a:lnTo>
                     <a:pt x="4162683" y="1630648"/>
@@ -8596,7 +8596,7 @@
                     <a:pt x="4443764" y="1996034"/>
                   </a:lnTo>
                   <a:lnTo>
-                    <a:pt x="4457149" y="2011366"/>
+                    <a:pt x="4457149" y="2011367"/>
                   </a:lnTo>
                   <a:lnTo>
                     <a:pt x="4470534" y="2026480"/>
@@ -10847,7 +10847,7 @@
                     <a:pt x="642471" y="2357528"/>
                   </a:lnTo>
                   <a:lnTo>
-                    <a:pt x="655856" y="2352832"/>
+                    <a:pt x="655856" y="2352833"/>
                   </a:lnTo>
                   <a:lnTo>
                     <a:pt x="669241" y="2348012"/>
@@ -10859,7 +10859,7 @@
                     <a:pt x="696011" y="2337886"/>
                   </a:lnTo>
                   <a:lnTo>
-                    <a:pt x="709396" y="2332414"/>
+                    <a:pt x="709396" y="2332415"/>
                   </a:lnTo>
                   <a:lnTo>
                     <a:pt x="722780" y="2326671"/>
@@ -10889,7 +10889,7 @@
                     <a:pt x="829859" y="2266437"/>
                   </a:lnTo>
                   <a:lnTo>
-                    <a:pt x="843244" y="2256646"/>
+                    <a:pt x="843244" y="2256647"/>
                   </a:lnTo>
                   <a:lnTo>
                     <a:pt x="856629" y="2246340"/>
@@ -10967,7 +10967,7 @@
                     <a:pt x="1177865" y="1845250"/>
                   </a:lnTo>
                   <a:lnTo>
-                    <a:pt x="1191250" y="1824294"/>
+                    <a:pt x="1191250" y="1824295"/>
                   </a:lnTo>
                   <a:lnTo>
                     <a:pt x="1204634" y="1803205"/>
@@ -10979,7 +10979,7 @@
                     <a:pt x="1231404" y="1760649"/>
                   </a:lnTo>
                   <a:lnTo>
-                    <a:pt x="1244789" y="1739158"/>
+                    <a:pt x="1244789" y="1739159"/>
                   </a:lnTo>
                   <a:lnTo>
                     <a:pt x="1258174" y="1717557"/>
@@ -10988,16 +10988,16 @@
                     <a:pt x="1271559" y="1695843"/>
                   </a:lnTo>
                   <a:lnTo>
-                    <a:pt x="1284943" y="1674013"/>
+                    <a:pt x="1284943" y="1674014"/>
                   </a:lnTo>
                   <a:lnTo>
                     <a:pt x="1298328" y="1652019"/>
                   </a:lnTo>
                   <a:lnTo>
-                    <a:pt x="1311713" y="1629873"/>
-                  </a:lnTo>
-                  <a:lnTo>
-                    <a:pt x="1325098" y="1607576"/>
+                    <a:pt x="1311713" y="1629874"/>
+                  </a:lnTo>
+                  <a:lnTo>
+                    <a:pt x="1325098" y="1607577"/>
                   </a:lnTo>
                   <a:lnTo>
                     <a:pt x="1338483" y="1585116"/>
@@ -11012,10 +11012,10 @@
                     <a:pt x="1378637" y="1516360"/>
                   </a:lnTo>
                   <a:lnTo>
-                    <a:pt x="1392022" y="1492951"/>
-                  </a:lnTo>
-                  <a:lnTo>
-                    <a:pt x="1405407" y="1469277"/>
+                    <a:pt x="1392022" y="1492952"/>
+                  </a:lnTo>
+                  <a:lnTo>
+                    <a:pt x="1405407" y="1469278"/>
                   </a:lnTo>
                   <a:lnTo>
                     <a:pt x="1418792" y="1445194"/>
@@ -11033,7 +11033,7 @@
                     <a:pt x="1472331" y="1345311"/>
                   </a:lnTo>
                   <a:lnTo>
-                    <a:pt x="1485716" y="1319248"/>
+                    <a:pt x="1485716" y="1319249"/>
                   </a:lnTo>
                   <a:lnTo>
                     <a:pt x="1499101" y="1292772"/>
@@ -11045,7 +11045,7 @@
                     <a:pt x="1525870" y="1238538"/>
                   </a:lnTo>
                   <a:lnTo>
-                    <a:pt x="1539255" y="1210609"/>
+                    <a:pt x="1539255" y="1210610"/>
                   </a:lnTo>
                   <a:lnTo>
                     <a:pt x="1552640" y="1182258"/>
@@ -11084,7 +11084,7 @@
                     <a:pt x="1699873" y="847339"/>
                   </a:lnTo>
                   <a:lnTo>
-                    <a:pt x="1713258" y="815995"/>
+                    <a:pt x="1713258" y="815996"/>
                   </a:lnTo>
                   <a:lnTo>
                     <a:pt x="1726643" y="784809"/>
@@ -11189,7 +11189,7 @@
                     <a:pt x="2168342" y="230953"/>
                   </a:lnTo>
                   <a:lnTo>
-                    <a:pt x="2181727" y="229804"/>
+                    <a:pt x="2181727" y="229805"/>
                   </a:lnTo>
                   <a:lnTo>
                     <a:pt x="2195112" y="228968"/>
@@ -11240,7 +11240,7 @@
                     <a:pt x="2395885" y="199190"/>
                   </a:lnTo>
                   <a:lnTo>
-                    <a:pt x="2409269" y="193815"/>
+                    <a:pt x="2409269" y="193816"/>
                   </a:lnTo>
                   <a:lnTo>
                     <a:pt x="2422654" y="187784"/>
@@ -11258,7 +11258,7 @@
                     <a:pt x="2476194" y="158646"/>
                   </a:lnTo>
                   <a:lnTo>
-                    <a:pt x="2489578" y="150166"/>
+                    <a:pt x="2489578" y="150167"/>
                   </a:lnTo>
                   <a:lnTo>
                     <a:pt x="2502963" y="141359"/>
@@ -11327,7 +11327,7 @@
                     <a:pt x="2784045" y="953"/>
                   </a:lnTo>
                   <a:lnTo>
-                    <a:pt x="2797430" y="3038"/>
+                    <a:pt x="2797430" y="3039"/>
                   </a:lnTo>
                   <a:lnTo>
                     <a:pt x="2810814" y="6277"/>
@@ -11363,7 +11363,7 @@
                     <a:pt x="2944663" y="108896"/>
                   </a:lnTo>
                   <a:lnTo>
-                    <a:pt x="2958048" y="125702"/>
+                    <a:pt x="2958048" y="125703"/>
                   </a:lnTo>
                   <a:lnTo>
                     <a:pt x="2971432" y="143396"/>
@@ -11387,22 +11387,22 @@
                     <a:pt x="3051741" y="264409"/>
                   </a:lnTo>
                   <a:lnTo>
-                    <a:pt x="3065126" y="286247"/>
-                  </a:lnTo>
-                  <a:lnTo>
-                    <a:pt x="3078511" y="308367"/>
+                    <a:pt x="3065126" y="286248"/>
+                  </a:lnTo>
+                  <a:lnTo>
+                    <a:pt x="3078511" y="308368"/>
                   </a:lnTo>
                   <a:lnTo>
                     <a:pt x="3091896" y="330576"/>
                   </a:lnTo>
                   <a:lnTo>
-                    <a:pt x="3105281" y="352805"/>
+                    <a:pt x="3105281" y="352806"/>
                   </a:lnTo>
                   <a:lnTo>
                     <a:pt x="3118666" y="374990"/>
                   </a:lnTo>
                   <a:lnTo>
-                    <a:pt x="3132050" y="397001"/>
+                    <a:pt x="3132050" y="397002"/>
                   </a:lnTo>
                   <a:lnTo>
                     <a:pt x="3145435" y="418732"/>
@@ -11411,7 +11411,7 @@
                     <a:pt x="3158820" y="440147"/>
                   </a:lnTo>
                   <a:lnTo>
-                    <a:pt x="3172205" y="461192"/>
+                    <a:pt x="3172205" y="461193"/>
                   </a:lnTo>
                   <a:lnTo>
                     <a:pt x="3185590" y="481772"/>
@@ -11423,13 +11423,13 @@
                     <a:pt x="3212359" y="521000"/>
                   </a:lnTo>
                   <a:lnTo>
-                    <a:pt x="3225744" y="539717"/>
+                    <a:pt x="3225744" y="539718"/>
                   </a:lnTo>
                   <a:lnTo>
                     <a:pt x="3239129" y="557793"/>
                   </a:lnTo>
                   <a:lnTo>
-                    <a:pt x="3252514" y="574967"/>
+                    <a:pt x="3252514" y="574968"/>
                   </a:lnTo>
                   <a:lnTo>
                     <a:pt x="3265899" y="591359"/>
@@ -11438,13 +11438,13 @@
                     <a:pt x="3279284" y="607021"/>
                   </a:lnTo>
                   <a:lnTo>
-                    <a:pt x="3292668" y="621945"/>
+                    <a:pt x="3292668" y="621946"/>
                   </a:lnTo>
                   <a:lnTo>
                     <a:pt x="3306053" y="636022"/>
                   </a:lnTo>
                   <a:lnTo>
-                    <a:pt x="3319438" y="649167"/>
+                    <a:pt x="3319438" y="649168"/>
                   </a:lnTo>
                   <a:lnTo>
                     <a:pt x="3332823" y="661597"/>
@@ -11453,19 +11453,19 @@
                     <a:pt x="3346208" y="673328"/>
                   </a:lnTo>
                   <a:lnTo>
-                    <a:pt x="3359593" y="684381"/>
-                  </a:lnTo>
-                  <a:lnTo>
-                    <a:pt x="3372977" y="694559"/>
-                  </a:lnTo>
-                  <a:lnTo>
-                    <a:pt x="3386362" y="704143"/>
+                    <a:pt x="3359593" y="684382"/>
+                  </a:lnTo>
+                  <a:lnTo>
+                    <a:pt x="3372977" y="694560"/>
+                  </a:lnTo>
+                  <a:lnTo>
+                    <a:pt x="3386362" y="704144"/>
                   </a:lnTo>
                   <a:lnTo>
                     <a:pt x="3399747" y="713193"/>
                   </a:lnTo>
                   <a:lnTo>
-                    <a:pt x="3413132" y="721749"/>
+                    <a:pt x="3413132" y="721750"/>
                   </a:lnTo>
                   <a:lnTo>
                     <a:pt x="3426517" y="729784"/>
@@ -11495,13 +11495,13 @@
                     <a:pt x="3533595" y="786614"/>
                   </a:lnTo>
                   <a:lnTo>
-                    <a:pt x="3546980" y="794003"/>
+                    <a:pt x="3546980" y="794004"/>
                   </a:lnTo>
                   <a:lnTo>
                     <a:pt x="3560365" y="801748"/>
                   </a:lnTo>
                   <a:lnTo>
-                    <a:pt x="3573750" y="809864"/>
+                    <a:pt x="3573750" y="809865"/>
                   </a:lnTo>
                   <a:lnTo>
                     <a:pt x="3587135" y="818398"/>
@@ -11525,7 +11525,7 @@
                     <a:pt x="3667444" y="882557"/>
                   </a:lnTo>
                   <a:lnTo>
-                    <a:pt x="3680829" y="895787"/>
+                    <a:pt x="3680829" y="895788"/>
                   </a:lnTo>
                   <a:lnTo>
                     <a:pt x="3694213" y="909716"/>
@@ -11555,10 +11555,10 @@
                     <a:pt x="3801292" y="1047593"/>
                   </a:lnTo>
                   <a:lnTo>
-                    <a:pt x="3814677" y="1067709"/>
-                  </a:lnTo>
-                  <a:lnTo>
-                    <a:pt x="3828062" y="1088296"/>
+                    <a:pt x="3814677" y="1067710"/>
+                  </a:lnTo>
+                  <a:lnTo>
+                    <a:pt x="3828062" y="1088297"/>
                   </a:lnTo>
                   <a:lnTo>
                     <a:pt x="3841447" y="1109398"/>
@@ -11630,7 +11630,7 @@
                     <a:pt x="4135913" y="1591238"/>
                   </a:lnTo>
                   <a:lnTo>
-                    <a:pt x="4149298" y="1611059"/>
+                    <a:pt x="4149298" y="1611060"/>
                   </a:lnTo>
                   <a:lnTo>
                     <a:pt x="4162683" y="1630648"/>
@@ -11699,7 +11699,7 @@
                     <a:pt x="4443764" y="1996034"/>
                   </a:lnTo>
                   <a:lnTo>
-                    <a:pt x="4457149" y="2011366"/>
+                    <a:pt x="4457149" y="2011367"/>
                   </a:lnTo>
                   <a:lnTo>
                     <a:pt x="4470534" y="2026480"/>
